--- a/madd-decks/dagger-alif/08-ta-dha.pptx
+++ b/madd-decks/dagger-alif/08-ta-dha.pptx
@@ -4,6 +4,9 @@
   <p:sldMasterIdLst>
     <p:sldMasterId id="2147483648" r:id="rId1"/>
   </p:sldMasterIdLst>
+  <p:notesMasterIdLst>
+    <p:notesMasterId r:id="rId20"/>
+  </p:notesMasterIdLst>
   <p:sldIdLst>
     <p:sldId id="256" r:id="rId2"/>
     <p:sldId id="257" r:id="rId3"/>
@@ -24,9 +27,6 @@
     <p:sldId id="272" r:id="rId18"/>
     <p:sldId id="273" r:id="rId19"/>
   </p:sldIdLst>
-  <p:notesMasterIdLst>
-    <p:notesMasterId r:id="rId20"/>
-  </p:notesMasterIdLst>
   <p:sldSz cx="9144000" cy="5143500"/>
   <p:notesSz cx="5143500" cy="9144000"/>
   <p:defaultTextStyle>
@@ -4349,9 +4349,6 @@
               </a:rPr>
               <a:t>هَبَطَ</a:t>
             </a:r>
-            <a:pPr algn="ctr" indent="0" marL="0">
-              <a:buNone/>
-            </a:pPr>
             <a:r>
               <a:rPr lang="ar-SA" altLang="en-US" sz="4290" dirty="0">
                 <a:solidFill>
@@ -6064,9 +6061,6 @@
               </a:rPr>
               <a:t>رَبَطَ</a:t>
             </a:r>
-            <a:pPr algn="ctr" indent="0" marL="0">
-              <a:buNone/>
-            </a:pPr>
             <a:r>
               <a:rPr lang="ar-SA" altLang="en-US" sz="4290" dirty="0">
                 <a:solidFill>
@@ -7779,9 +7773,6 @@
               </a:rPr>
               <a:t>طَ</a:t>
             </a:r>
-            <a:pPr algn="ctr" indent="0" marL="0">
-              <a:buNone/>
-            </a:pPr>
             <a:r>
               <a:rPr lang="ar-SA" altLang="en-US" sz="4290" dirty="0">
                 <a:solidFill>
@@ -7793,9 +7784,6 @@
               </a:rPr>
               <a:t>ا</a:t>
             </a:r>
-            <a:pPr algn="ctr" indent="0" marL="0">
-              <a:buNone/>
-            </a:pPr>
             <a:r>
               <a:rPr lang="ar-SA" altLang="en-US" sz="6600" dirty="0">
                 <a:solidFill>
@@ -9508,9 +9496,6 @@
               </a:rPr>
               <a:t>طَ</a:t>
             </a:r>
-            <a:pPr algn="ctr" indent="0" marL="0">
-              <a:buNone/>
-            </a:pPr>
             <a:r>
               <a:rPr lang="ar-SA" altLang="en-US" sz="4290" dirty="0">
                 <a:solidFill>
@@ -9522,9 +9507,6 @@
               </a:rPr>
               <a:t>ا</a:t>
             </a:r>
-            <a:pPr algn="ctr" indent="0" marL="0">
-              <a:buNone/>
-            </a:pPr>
             <a:r>
               <a:rPr lang="ar-SA" altLang="en-US" sz="6600" dirty="0">
                 <a:solidFill>
@@ -11237,9 +11219,6 @@
               </a:rPr>
               <a:t>طَ</a:t>
             </a:r>
-            <a:pPr algn="ctr" indent="0" marL="0">
-              <a:buNone/>
-            </a:pPr>
             <a:r>
               <a:rPr lang="ar-SA" altLang="en-US" sz="4290" dirty="0">
                 <a:solidFill>
@@ -11251,9 +11230,6 @@
               </a:rPr>
               <a:t>ا</a:t>
             </a:r>
-            <a:pPr algn="ctr" indent="0" marL="0">
-              <a:buNone/>
-            </a:pPr>
             <a:r>
               <a:rPr lang="ar-SA" altLang="en-US" sz="6600" dirty="0">
                 <a:solidFill>
@@ -12966,9 +12942,6 @@
               </a:rPr>
               <a:t>وَعَظَ</a:t>
             </a:r>
-            <a:pPr algn="ctr" indent="0" marL="0">
-              <a:buNone/>
-            </a:pPr>
             <a:r>
               <a:rPr lang="ar-SA" altLang="en-US" sz="4290" dirty="0">
                 <a:solidFill>
@@ -14681,9 +14654,6 @@
               </a:rPr>
               <a:t>لَحَظَ</a:t>
             </a:r>
-            <a:pPr algn="ctr" indent="0" marL="0">
-              <a:buNone/>
-            </a:pPr>
             <a:r>
               <a:rPr lang="ar-SA" altLang="en-US" sz="4290" dirty="0">
                 <a:solidFill>
@@ -16396,9 +16366,6 @@
               </a:rPr>
               <a:t>غَلَظَ</a:t>
             </a:r>
-            <a:pPr algn="ctr" indent="0" marL="0">
-              <a:buNone/>
-            </a:pPr>
             <a:r>
               <a:rPr lang="ar-SA" altLang="en-US" sz="4290" dirty="0">
                 <a:solidFill>
@@ -18111,9 +18078,6 @@
               </a:rPr>
               <a:t>ظَ</a:t>
             </a:r>
-            <a:pPr algn="ctr" indent="0" marL="0">
-              <a:buNone/>
-            </a:pPr>
             <a:r>
               <a:rPr lang="ar-SA" altLang="en-US" sz="4290" dirty="0">
                 <a:solidFill>
@@ -18125,9 +18089,6 @@
               </a:rPr>
               <a:t>ا</a:t>
             </a:r>
-            <a:pPr algn="ctr" indent="0" marL="0">
-              <a:buNone/>
-            </a:pPr>
             <a:r>
               <a:rPr lang="ar-SA" altLang="en-US" sz="6600" dirty="0">
                 <a:solidFill>
@@ -19712,9 +19673,6 @@
               </a:rPr>
               <a:t>خَطَ</a:t>
             </a:r>
-            <a:pPr algn="ctr" indent="0" marL="0">
-              <a:buNone/>
-            </a:pPr>
             <a:r>
               <a:rPr lang="ar-SA" altLang="en-US" sz="5850" dirty="0">
                 <a:solidFill>
@@ -21137,9 +21095,6 @@
               </a:rPr>
               <a:t>سَطَ</a:t>
             </a:r>
-            <a:pPr algn="ctr" indent="0" marL="0">
-              <a:buNone/>
-            </a:pPr>
             <a:r>
               <a:rPr lang="ar-SA" altLang="en-US" sz="5850" dirty="0">
                 <a:solidFill>
@@ -22562,9 +22517,6 @@
               </a:rPr>
               <a:t>طَ</a:t>
             </a:r>
-            <a:pPr algn="ctr" indent="0" marL="0">
-              <a:buNone/>
-            </a:pPr>
             <a:r>
               <a:rPr lang="ar-SA" altLang="en-US" sz="5850" dirty="0">
                 <a:solidFill>
@@ -22576,9 +22528,6 @@
               </a:rPr>
               <a:t>ا</a:t>
             </a:r>
-            <a:pPr algn="ctr" indent="0" marL="0">
-              <a:buNone/>
-            </a:pPr>
             <a:r>
               <a:rPr lang="ar-SA" altLang="en-US" sz="9000" dirty="0">
                 <a:solidFill>
@@ -24001,9 +23950,6 @@
               </a:rPr>
               <a:t>طَ</a:t>
             </a:r>
-            <a:pPr algn="ctr" indent="0" marL="0">
-              <a:buNone/>
-            </a:pPr>
             <a:r>
               <a:rPr lang="ar-SA" altLang="en-US" sz="5850" dirty="0">
                 <a:solidFill>
@@ -24015,9 +23961,6 @@
               </a:rPr>
               <a:t>ا</a:t>
             </a:r>
-            <a:pPr algn="ctr" indent="0" marL="0">
-              <a:buNone/>
-            </a:pPr>
             <a:r>
               <a:rPr lang="ar-SA" altLang="en-US" sz="9000" dirty="0">
                 <a:solidFill>
@@ -25440,9 +25383,6 @@
               </a:rPr>
               <a:t>طَ</a:t>
             </a:r>
-            <a:pPr algn="ctr" indent="0" marL="0">
-              <a:buNone/>
-            </a:pPr>
             <a:r>
               <a:rPr lang="ar-SA" altLang="en-US" sz="5850" dirty="0">
                 <a:solidFill>
@@ -25454,9 +25394,6 @@
               </a:rPr>
               <a:t>ا</a:t>
             </a:r>
-            <a:pPr algn="ctr" indent="0" marL="0">
-              <a:buNone/>
-            </a:pPr>
             <a:r>
               <a:rPr lang="ar-SA" altLang="en-US" sz="9000" dirty="0">
                 <a:solidFill>
@@ -26879,9 +26816,6 @@
               </a:rPr>
               <a:t>طَ</a:t>
             </a:r>
-            <a:pPr algn="ctr" indent="0" marL="0">
-              <a:buNone/>
-            </a:pPr>
             <a:r>
               <a:rPr lang="ar-SA" altLang="en-US" sz="5850" dirty="0">
                 <a:solidFill>
@@ -26893,9 +26827,6 @@
               </a:rPr>
               <a:t>ا</a:t>
             </a:r>
-            <a:pPr algn="ctr" indent="0" marL="0">
-              <a:buNone/>
-            </a:pPr>
             <a:r>
               <a:rPr lang="ar-SA" altLang="en-US" sz="9000" dirty="0">
                 <a:solidFill>
@@ -29368,9 +29299,6 @@
               </a:rPr>
               <a:t>سَقَطَ</a:t>
             </a:r>
-            <a:pPr algn="ctr" indent="0" marL="0">
-              <a:buNone/>
-            </a:pPr>
             <a:r>
               <a:rPr lang="ar-SA" altLang="en-US" sz="4290" dirty="0">
                 <a:solidFill>
